--- a/docs/BeakGraph-HDF5-Architecture.pptx
+++ b/docs/BeakGraph-HDF5-Architecture.pptx
@@ -4671,7 +4671,7 @@
               </a:defRPr>
             </a:pPr>
             <a:r>
-              <a:t>VoID + SPARQL Service Description statistics are embedded as ordinary quads in graph urn:x-beakgraph:void at build time</a:t>
+              <a:t>VoID + SPARQL Service Description statistics can be embedded as ordinary quads in graph urn:x-beakgraph:void (-void exact / -voidsketch HyperLogLog; off by default - readers then use a fixed join-reorder heuristic)</a:t>
             </a:r>
           </a:p>
         </p:txBody>
